--- a/youtube_ranking_20260513.pptx
+++ b/youtube_ranking_20260513.pptx
@@ -3479,7 +3479,7 @@
                 </a:solidFill>
                 <a:latin typeface="Arial"/>
               </a:rPr>
-              <a:t>👁 134,853  👍 2,367  💬 321</a:t>
+              <a:t>👁 138,897  👍 2,428  💬 324  📈+3.0%</a:t>
             </a:r>
           </a:p>
         </p:txBody>
@@ -3514,7 +3514,7 @@
                 </a:solidFill>
                 <a:latin typeface="Arial"/>
               </a:rPr>
-              <a:t>⏱ 1:25  ·  公開2時間前</a:t>
+              <a:t>⏱ 1:25  ·  公開3時間前</a:t>
             </a:r>
           </a:p>
         </p:txBody>
@@ -3549,7 +3549,7 @@
                 </a:solidFill>
                 <a:latin typeface="Arial"/>
               </a:rPr>
-              <a:t>💡 公開2時間で急上昇入り！　10万再生突破の話題作</a:t>
+              <a:t>💡 公開3時間で急上昇入り！　10万再生突破の話題作</a:t>
             </a:r>
           </a:p>
         </p:txBody>
@@ -3826,7 +3826,7 @@
                 </a:solidFill>
                 <a:latin typeface="Arial"/>
               </a:rPr>
-              <a:t>👁 281,746  👍 21,227  💬 0  ⏱ 3:07  📅 公開10時間前</a:t>
+              <a:t>👁 286,512  👍 21,325  💬 0  ⏱ 3:07  📅 公開11時間前</a:t>
             </a:r>
           </a:p>
         </p:txBody>
@@ -3861,7 +3861,7 @@
                 </a:solidFill>
                 <a:latin typeface="Arial"/>
               </a:rPr>
-              <a:t>💡 公開10時間で急上昇入り！　10万再生突破の話題作　いいね率7.5%と視聴者の支持が非常に高い</a:t>
+              <a:t>💡 公開11時間で急上昇入り！　10万再生突破の話題作　いいね率7.4%と視聴者の支持が非常に高い</a:t>
             </a:r>
           </a:p>
         </p:txBody>
@@ -4132,7 +4132,7 @@
                 </a:solidFill>
                 <a:latin typeface="Arial"/>
               </a:rPr>
-              <a:t>📺 やっさん2  👁 19,140,822  👍 158,089  ⏱ 0:10  📅 2025-08-09</a:t>
+              <a:t>📺 やっさん2  👁 19,140,947  👍 158,089  ⏱ 0:10  📅 2025-08-09</a:t>
             </a:r>
           </a:p>
         </p:txBody>
@@ -4272,7 +4272,7 @@
                 <a:latin typeface="Arial"/>
                 <a:hlinkClick r:id="rId5"/>
               </a:rPr>
-              <a:t>[🔴LIVE]  깔깔티비 💫1박2일💫 화질UP 🔥24시간 무한 스트리밍🔥 ㅣ…</a:t>
+              <a:t>Taşacak Bu Deniz - Tüm Bölümler Canlı Yayı…</a:t>
             </a:r>
           </a:p>
         </p:txBody>
@@ -4307,7 +4307,7 @@
                 </a:solidFill>
                 <a:latin typeface="Arial"/>
               </a:rPr>
-              <a:t>📺 KBS Entertain: 깔깔티비  👁 16,187,020  👍 9,713  ⏱ 不明  📅 2025-04-07</a:t>
+              <a:t>📺 Taşacak Bu Deniz  👁 16,307,088  👍 65,325  ⏱ 不明  📅 2026-02-11</a:t>
             </a:r>
           </a:p>
         </p:txBody>
@@ -4447,7 +4447,7 @@
                 <a:latin typeface="Arial"/>
                 <a:hlinkClick r:id="rId7"/>
               </a:rPr>
-              <a:t>無反応挑戦　w#おもしろ＃おもしろ動画＃エンタメ#お笑い#バラエティ#テレビ#バズれ…</a:t>
+              <a:t>[🔴LIVE]  깔깔티비 💫1박2일💫 화질UP 🔥24시간 무한 스트리밍🔥 ㅣ…</a:t>
             </a:r>
           </a:p>
         </p:txBody>
@@ -4482,7 +4482,7 @@
                 </a:solidFill>
                 <a:latin typeface="Arial"/>
               </a:rPr>
-              <a:t>📺 ネタ秒  👁 14,609,574  👍 41,787  ⏱ 0:17  📅 2025-09-26</a:t>
+              <a:t>📺 KBS Entertain: 깔깔티비  👁 16,187,598  👍 9,713  ⏱ 不明  📅 2025-04-07</a:t>
             </a:r>
           </a:p>
         </p:txBody>
@@ -4622,7 +4622,7 @@
                 <a:latin typeface="Arial"/>
                 <a:hlinkClick r:id="rId9"/>
               </a:rPr>
-              <a:t>クビの真相は？【GOKKO】【ごっこ倶楽部】【企業研究】【エンタメ業界】【IT業界】…</a:t>
+              <a:t>無反応挑戦　w#おもしろ＃おもしろ動画＃エンタメ#お笑い#バラエティ#テレビ#バズれ…</a:t>
             </a:r>
           </a:p>
         </p:txBody>
@@ -4657,7 +4657,7 @@
                 </a:solidFill>
                 <a:latin typeface="Arial"/>
               </a:rPr>
-              <a:t>📺 ごっこ倶楽部のウラ垢 - STUDIO GOKKO -  👁 12,780,735  👍 170,587  ⏱ 1:28  📅 2025-04-14</a:t>
+              <a:t>📺 ネタ秒  👁 14,609,574  👍 41,786  ⏱ 0:17  📅 2025-09-26</a:t>
             </a:r>
           </a:p>
         </p:txBody>
@@ -4832,7 +4832,7 @@
                 </a:solidFill>
                 <a:latin typeface="Arial"/>
               </a:rPr>
-              <a:t>📺 El Chavo del 8  👁 12,255,677  👍 43,986  ⏱ 不明  📅 2025-12-25</a:t>
+              <a:t>📺 El Chavo del 8  👁 12,255,938  👍 43,987  ⏱ 不明  📅 2025-12-25</a:t>
             </a:r>
           </a:p>
         </p:txBody>
@@ -5103,7 +5103,7 @@
                 </a:solidFill>
                 <a:latin typeface="Arial"/>
               </a:rPr>
-              <a:t>📺 ウッドリィ  👁 24,712,704  👍 377,943  ⏱ 0:37  📅 2024-09-30</a:t>
+              <a:t>📺 ウッドリィ  👁 24,712,901  👍 377,946  ⏱ 0:37  📅 2024-09-30</a:t>
             </a:r>
           </a:p>
         </p:txBody>
@@ -5278,7 +5278,7 @@
                 </a:solidFill>
                 <a:latin typeface="Arial"/>
               </a:rPr>
-              <a:t>📺 にこみチャンネル  👁 20,444,865  👍 362,601  ⏱ 0:59  📅 2023-12-22</a:t>
+              <a:t>📺 にこみチャンネル  👁 20,444,859  👍 362,601  ⏱ 0:59  📅 2023-12-22</a:t>
             </a:r>
           </a:p>
         </p:txBody>
@@ -5453,7 +5453,7 @@
                 </a:solidFill>
                 <a:latin typeface="Arial"/>
               </a:rPr>
-              <a:t>📺 タン  👁 19,794,652  👍 389,848  ⏱ 1:00  📅 2023-09-28</a:t>
+              <a:t>📺 タン  👁 19,794,656  👍 389,849  ⏱ 1:00  📅 2023-09-28</a:t>
             </a:r>
           </a:p>
         </p:txBody>
@@ -5628,7 +5628,7 @@
                 </a:solidFill>
                 <a:latin typeface="Arial"/>
               </a:rPr>
-              <a:t>📺 ゼロ / ZERO  👁 18,635,737  👍 547,113  ⏱ 0:44  📅 2024-12-11</a:t>
+              <a:t>📺 ゼロ / ZERO  👁 18,635,739  👍 547,113  ⏱ 0:44  📅 2024-12-11</a:t>
             </a:r>
           </a:p>
         </p:txBody>
@@ -5803,7 +5803,7 @@
                 </a:solidFill>
                 <a:latin typeface="Arial"/>
               </a:rPr>
-              <a:t>📺 葉ちゅべ  👁 18,303,122  👍 348,040  ⏱ 0:38  📅 2023-07-07</a:t>
+              <a:t>📺 葉ちゅべ  👁 18,303,166  👍 348,045  ⏱ 0:38  📅 2023-07-07</a:t>
             </a:r>
           </a:p>
         </p:txBody>
@@ -6074,7 +6074,7 @@
                 </a:solidFill>
                 <a:latin typeface="Arial"/>
               </a:rPr>
-              <a:t>📺 TOHO animation チャンネル  👁 139,511,480  👍 0  ⏱ 1:31  📅 2023-07-07</a:t>
+              <a:t>📺 TOHO animation チャンネル  👁 139,512,732  👍 0  ⏱ 1:31  📅 2023-07-07</a:t>
             </a:r>
           </a:p>
         </p:txBody>
@@ -6249,7 +6249,7 @@
                 </a:solidFill>
                 <a:latin typeface="Arial"/>
               </a:rPr>
-              <a:t>📺 TOHO animation チャンネル  👁 105,035,308  👍 0  ⏱ 4:17  📅 2017-12-18</a:t>
+              <a:t>📺 TOHO animation チャンネル  👁 105,035,875  👍 0  ⏱ 4:17  📅 2017-12-18</a:t>
             </a:r>
           </a:p>
         </p:txBody>
@@ -6424,7 +6424,7 @@
                 </a:solidFill>
                 <a:latin typeface="Arial"/>
               </a:rPr>
-              <a:t>📺 アニメキッズanimekids  👁 44,214,770  👍 0  ⏱ 12:11  📅 2017-11-13</a:t>
+              <a:t>📺 アニメキッズanimekids  👁 44,214,906  👍 0  ⏱ 12:11  📅 2017-11-13</a:t>
             </a:r>
           </a:p>
         </p:txBody>
@@ -6599,7 +6599,7 @@
                 </a:solidFill>
                 <a:latin typeface="Arial"/>
               </a:rPr>
-              <a:t>📺 アイナ・ジ・エンド Official  👁 42,208,643  👍 183,686  ⏱ 3:22  📅 2025-08-20</a:t>
+              <a:t>📺 アイナ・ジ・エンド Official  👁 42,210,252  👍 183,693  ⏱ 3:22  📅 2025-08-20</a:t>
             </a:r>
           </a:p>
         </p:txBody>
@@ -6774,7 +6774,7 @@
                 </a:solidFill>
                 <a:latin typeface="Arial"/>
               </a:rPr>
-              <a:t>📺 TOHO animation チャンネル  👁 33,476,113  👍 508,556  ⏱ 1:31  📅 2026-01-09</a:t>
+              <a:t>📺 TOHO animation チャンネル  👁 33,477,196  👍 508,558  ⏱ 1:31  📅 2026-01-09</a:t>
             </a:r>
           </a:p>
         </p:txBody>
@@ -7220,7 +7220,7 @@
                 </a:solidFill>
                 <a:latin typeface="Arial"/>
               </a:rPr>
-              <a:t>📺 KABUKU. / 市川團十郎。  👁 3,485,313  👍 45,015  ⏱ 17:48  📅 2025-07-12</a:t>
+              <a:t>📺 KABUKU. / 市川團十郎。  👁 3,485,319  👍 45,015  ⏱ 17:48  📅 2025-07-12</a:t>
             </a:r>
           </a:p>
         </p:txBody>
@@ -7395,7 +7395,7 @@
                 </a:solidFill>
                 <a:latin typeface="Arial"/>
               </a:rPr>
-              <a:t>📺 東海オンエア  👁 3,311,105  👍 29,750  ⏱ 34:45  📅 2024-09-26</a:t>
+              <a:t>📺 東海オンエア  👁 3,311,138  👍 29,750  ⏱ 34:45  📅 2024-09-26</a:t>
             </a:r>
           </a:p>
         </p:txBody>
@@ -7570,7 +7570,7 @@
                 </a:solidFill>
                 <a:latin typeface="Arial"/>
               </a:rPr>
-              <a:t>📺 ホッカイロレン  👁 3,256,421  👍 43,126  ⏱ 12:56  📅 2023-12-19</a:t>
+              <a:t>📺 ホッカイロレン  👁 3,256,504  👍 43,127  ⏱ 12:56  📅 2023-12-19</a:t>
             </a:r>
           </a:p>
         </p:txBody>
@@ -7745,7 +7745,7 @@
                 </a:solidFill>
                 <a:latin typeface="Arial"/>
               </a:rPr>
-              <a:t>📺 2ch有益プラネット【ゆっくり解説】  👁 2,947,854  👍 35,235  ⏱ 0:59  📅 2023-10-19</a:t>
+              <a:t>📺 2ch有益プラネット【ゆっくり解説】  👁 2,947,931  👍 35,235  ⏱ 0:59  📅 2023-10-19</a:t>
             </a:r>
           </a:p>
         </p:txBody>
@@ -7971,7 +7971,7 @@
                 </a:solidFill>
                 <a:latin typeface="Arial"/>
               </a:rPr>
-              <a:t>👁 61,665  👍 10,120  💬 1,248</a:t>
+              <a:t>👁 71,848  👍 10,598  💬 1,299  📈+16.5%</a:t>
             </a:r>
           </a:p>
         </p:txBody>
@@ -8041,7 +8041,7 @@
                 </a:solidFill>
                 <a:latin typeface="Arial"/>
               </a:rPr>
-              <a:t>💡 公開-5時間で急上昇入り！　急上昇中の新興コンテンツ　いいね率16.4%と視聴者の支持が非常に高い</a:t>
+              <a:t>💡 公開-5時間で急上昇入り！　急上昇中の新興コンテンツ　前日比+16.5%で着実に成長</a:t>
             </a:r>
           </a:p>
         </p:txBody>
@@ -8267,7 +8267,7 @@
                 </a:solidFill>
                 <a:latin typeface="Arial"/>
               </a:rPr>
-              <a:t>👁 121,247  👍 5,716  💬 388</a:t>
+              <a:t>👁 122,393  👍 5,749  💬 389  📈+0.9%</a:t>
             </a:r>
           </a:p>
         </p:txBody>
@@ -8302,7 +8302,7 @@
                 </a:solidFill>
                 <a:latin typeface="Arial"/>
               </a:rPr>
-              <a:t>⏱ 4:26  ·  公開15時間前</a:t>
+              <a:t>⏱ 4:26  ·  公開16時間前</a:t>
             </a:r>
           </a:p>
         </p:txBody>
@@ -8337,7 +8337,7 @@
                 </a:solidFill>
                 <a:latin typeface="Arial"/>
               </a:rPr>
-              <a:t>💡 公開15時間で急上昇入り！　10万再生突破の話題作　いいね率4.7%と好評価</a:t>
+              <a:t>💡 公開16時間で急上昇入り！　10万再生突破の話題作　いいね率4.7%と好評価</a:t>
             </a:r>
           </a:p>
         </p:txBody>
@@ -8563,7 +8563,7 @@
                 </a:solidFill>
                 <a:latin typeface="Arial"/>
               </a:rPr>
-              <a:t>👁 120,245  👍 3,760  💬 539</a:t>
+              <a:t>👁 126,146  👍 3,859  💬 549  📈+4.9%</a:t>
             </a:r>
           </a:p>
         </p:txBody>
@@ -8598,7 +8598,7 @@
                 </a:solidFill>
                 <a:latin typeface="Arial"/>
               </a:rPr>
-              <a:t>⏱ 50:41  ·  公開-1時間前</a:t>
+              <a:t>⏱ 50:41  ·  公開0時間前</a:t>
             </a:r>
           </a:p>
         </p:txBody>
@@ -8633,7 +8633,7 @@
                 </a:solidFill>
                 <a:latin typeface="Arial"/>
               </a:rPr>
-              <a:t>💡 公開-1時間で急上昇入り！　10万再生突破の話題作　いいね率3.1%と好評価</a:t>
+              <a:t>💡 公開0時間で急上昇入り！　10万再生突破の話題作　いいね率3.1%と好評価</a:t>
             </a:r>
           </a:p>
         </p:txBody>
@@ -8859,7 +8859,7 @@
                 </a:solidFill>
                 <a:latin typeface="Arial"/>
               </a:rPr>
-              <a:t>👁 524,404  👍 24,065  💬 3,806</a:t>
+              <a:t>👁 529,007  👍 24,159  💬 3,832  📈+0.9%</a:t>
             </a:r>
           </a:p>
         </p:txBody>
@@ -8894,7 +8894,7 @@
                 </a:solidFill>
                 <a:latin typeface="Arial"/>
               </a:rPr>
-              <a:t>⏱ 2:28  ·  公開12時間前</a:t>
+              <a:t>⏱ 2:28  ·  公開13時間前</a:t>
             </a:r>
           </a:p>
         </p:txBody>
@@ -8929,7 +8929,7 @@
                 </a:solidFill>
                 <a:latin typeface="Arial"/>
               </a:rPr>
-              <a:t>💡 公開12時間で急上昇入り！　50万再生の注目コンテンツ　いいね率4.6%と好評価</a:t>
+              <a:t>💡 公開13時間で急上昇入り！　50万再生の注目コンテンツ　いいね率4.6%と好評価</a:t>
             </a:r>
           </a:p>
         </p:txBody>
@@ -9155,7 +9155,7 @@
                 </a:solidFill>
                 <a:latin typeface="Arial"/>
               </a:rPr>
-              <a:t>👁 89,590  👍 4,769  💬 277</a:t>
+              <a:t>👁 99,762  👍 5,087  💬 285  📈+11.4%</a:t>
             </a:r>
           </a:p>
         </p:txBody>
@@ -9190,7 +9190,7 @@
                 </a:solidFill>
                 <a:latin typeface="Arial"/>
               </a:rPr>
-              <a:t>⏱ 28:34  ·  公開-6時間前</a:t>
+              <a:t>⏱ 28:34  ·  公開-5時間前</a:t>
             </a:r>
           </a:p>
         </p:txBody>
@@ -9225,7 +9225,7 @@
                 </a:solidFill>
                 <a:latin typeface="Arial"/>
               </a:rPr>
-              <a:t>💡 公開-6時間で急上昇入り！　急上昇中の新興コンテンツ　いいね率5.3%と視聴者の支持が非常に高い</a:t>
+              <a:t>💡 公開-5時間で急上昇入り！　急上昇中の新興コンテンツ　前日比+11.4%で着実に成長</a:t>
             </a:r>
           </a:p>
         </p:txBody>
@@ -9451,7 +9451,7 @@
                 </a:solidFill>
                 <a:latin typeface="Arial"/>
               </a:rPr>
-              <a:t>👁 34,322  👍 1,035  💬 33</a:t>
+              <a:t>👁 35,253  👍 1,059  💬 33  📈+2.7%</a:t>
             </a:r>
           </a:p>
         </p:txBody>
@@ -9486,7 +9486,7 @@
                 </a:solidFill>
                 <a:latin typeface="Arial"/>
               </a:rPr>
-              <a:t>⏱ 0:38  ·  公開2時間前</a:t>
+              <a:t>⏱ 0:38  ·  公開3時間前</a:t>
             </a:r>
           </a:p>
         </p:txBody>
@@ -9521,7 +9521,7 @@
                 </a:solidFill>
                 <a:latin typeface="Arial"/>
               </a:rPr>
-              <a:t>💡 公開2時間で急上昇入り！　急上昇中の新興コンテンツ　いいね率3.0%と好評価</a:t>
+              <a:t>💡 公開3時間で急上昇入り！　急上昇中の新興コンテンツ　いいね率3.0%と好評価</a:t>
             </a:r>
           </a:p>
         </p:txBody>
@@ -9747,7 +9747,7 @@
                 </a:solidFill>
                 <a:latin typeface="Arial"/>
               </a:rPr>
-              <a:t>👁 56,568  👍 12,664  💬 598</a:t>
+              <a:t>👁 62,883  👍 13,728  💬 636  📈+11.2%</a:t>
             </a:r>
           </a:p>
         </p:txBody>
@@ -9782,7 +9782,7 @@
                 </a:solidFill>
                 <a:latin typeface="Arial"/>
               </a:rPr>
-              <a:t>⏱ 3:13  ·  公開-7時間前</a:t>
+              <a:t>⏱ 3:13  ·  公開-6時間前</a:t>
             </a:r>
           </a:p>
         </p:txBody>
@@ -9817,7 +9817,7 @@
                 </a:solidFill>
                 <a:latin typeface="Arial"/>
               </a:rPr>
-              <a:t>💡 公開-7時間で急上昇入り！　急上昇中の新興コンテンツ　いいね率22.4%と視聴者の支持が非常に高い</a:t>
+              <a:t>💡 公開-6時間で急上昇入り！　急上昇中の新興コンテンツ　前日比+11.2%で着実に成長</a:t>
             </a:r>
           </a:p>
         </p:txBody>
@@ -10043,7 +10043,7 @@
                 </a:solidFill>
                 <a:latin typeface="Arial"/>
               </a:rPr>
-              <a:t>👁 92,257  👍 1,475  💬 165</a:t>
+              <a:t>👁 96,648  👍 1,500  💬 166  📈+4.8%</a:t>
             </a:r>
           </a:p>
         </p:txBody>
@@ -10078,7 +10078,7 @@
                 </a:solidFill>
                 <a:latin typeface="Arial"/>
               </a:rPr>
-              <a:t>⏱ 6:31  ·  公開-4時間前</a:t>
+              <a:t>⏱ 6:31  ·  公開-3時間前</a:t>
             </a:r>
           </a:p>
         </p:txBody>
@@ -10113,7 +10113,7 @@
                 </a:solidFill>
                 <a:latin typeface="Arial"/>
               </a:rPr>
-              <a:t>💡 公開-4時間で急上昇入り！　急上昇中の新興コンテンツ</a:t>
+              <a:t>💡 公開-3時間で急上昇入り！　急上昇中の新興コンテンツ</a:t>
             </a:r>
           </a:p>
         </p:txBody>
